--- a/SRWE_Module_14.pptx
+++ b/SRWE_Module_14.pptx
@@ -262,7 +262,7 @@
   <pc:docChgLst>
     <pc:chgData name="Baráth, Július" userId="aebde9b9-dccc-4475-a9ac-c05e78323d7a" providerId="ADAL" clId="{4A0811C8-ED2F-505E-B787-C8270CED5046}"/>
     <pc:docChg chg="modSld">
-      <pc:chgData name="Baráth, Július" userId="aebde9b9-dccc-4475-a9ac-c05e78323d7a" providerId="ADAL" clId="{4A0811C8-ED2F-505E-B787-C8270CED5046}" dt="2026-05-11T12:04:42.737" v="2" actId="729"/>
+      <pc:chgData name="Baráth, Július" userId="aebde9b9-dccc-4475-a9ac-c05e78323d7a" providerId="ADAL" clId="{4A0811C8-ED2F-505E-B787-C8270CED5046}" dt="2026-05-18T09:03:53.177" v="16" actId="20577"/>
       <pc:docMkLst>
         <pc:docMk/>
       </pc:docMkLst>
@@ -293,6 +293,21 @@
           <pc:docMk/>
           <pc:sldMk cId="3279375280" sldId="1287"/>
         </pc:sldMkLst>
+      </pc:sldChg>
+      <pc:sldChg chg="modSp mod">
+        <pc:chgData name="Baráth, Július" userId="aebde9b9-dccc-4475-a9ac-c05e78323d7a" providerId="ADAL" clId="{4A0811C8-ED2F-505E-B787-C8270CED5046}" dt="2026-05-18T09:03:53.177" v="16" actId="20577"/>
+        <pc:sldMkLst>
+          <pc:docMk/>
+          <pc:sldMk cId="1655099001" sldId="1289"/>
+        </pc:sldMkLst>
+        <pc:spChg chg="mod">
+          <ac:chgData name="Baráth, Július" userId="aebde9b9-dccc-4475-a9ac-c05e78323d7a" providerId="ADAL" clId="{4A0811C8-ED2F-505E-B787-C8270CED5046}" dt="2026-05-18T09:03:53.177" v="16" actId="20577"/>
+          <ac:spMkLst>
+            <pc:docMk/>
+            <pc:sldMk cId="1655099001" sldId="1289"/>
+            <ac:spMk id="5" creationId="{3DC8D2B8-63E5-CA4E-BB47-C2D9CFA2CFAE}"/>
+          </ac:spMkLst>
+        </pc:spChg>
       </pc:sldChg>
       <pc:sldChg chg="mod modShow">
         <pc:chgData name="Baráth, Július" userId="aebde9b9-dccc-4475-a9ac-c05e78323d7a" providerId="ADAL" clId="{4A0811C8-ED2F-505E-B787-C8270CED5046}" dt="2026-05-11T12:04:42.737" v="2" actId="729"/>
@@ -402,7 +417,7 @@
           <a:p>
             <a:fld id="{136337D9-3022-3D41-8D8A-BDF2F3B0DD8E}" type="datetimeFigureOut">
               <a:rPr lang="en-US" smtClean="0"/>
-              <a:t>5/11/26</a:t>
+              <a:t>5/18/26</a:t>
             </a:fld>
             <a:endParaRPr lang="en-US" dirty="0"/>
           </a:p>
@@ -38540,13 +38555,13 @@
   <p:clrMapOvr>
     <a:masterClrMapping/>
   </p:clrMapOvr>
-  <mc:AlternateContent xmlns:mc="http://schemas.openxmlformats.org/markup-compatibility/2006">
-    <mc:Choice xmlns:p14="http://schemas.microsoft.com/office/powerpoint/2010/main" Requires="p14">
+  <mc:AlternateContent xmlns:mc="http://schemas.openxmlformats.org/markup-compatibility/2006" xmlns:p14="http://schemas.microsoft.com/office/powerpoint/2010/main">
+    <mc:Choice Requires="p14">
       <p:transition spd="med" p14:dur="700">
         <p:fade/>
       </p:transition>
     </mc:Choice>
-    <mc:Fallback>
+    <mc:Fallback xmlns="">
       <p:transition spd="med">
         <p:fade/>
       </p:transition>
@@ -39381,7 +39396,7 @@
                   <a:srgbClr val="000000"/>
                 </a:solidFill>
               </a:rPr>
-              <a:t>Route source</a:t>
+              <a:t>1 Route source</a:t>
             </a:r>
             <a:r>
               <a:rPr lang="en-US" sz="1350" dirty="0">
@@ -39403,7 +39418,7 @@
                   <a:srgbClr val="000000"/>
                 </a:solidFill>
               </a:rPr>
-              <a:t>Destination network (prefix and prefix length)</a:t>
+              <a:t>2 Destination network (prefix and prefix length)</a:t>
             </a:r>
             <a:r>
               <a:rPr lang="en-US" sz="1350" dirty="0">
@@ -39425,7 +39440,7 @@
                   <a:srgbClr val="000000"/>
                 </a:solidFill>
               </a:rPr>
-              <a:t>Administrative distance</a:t>
+              <a:t>3 Administrative distance</a:t>
             </a:r>
             <a:r>
               <a:rPr lang="en-US" sz="1350" dirty="0">
@@ -39447,7 +39462,7 @@
                   <a:srgbClr val="000000"/>
                 </a:solidFill>
               </a:rPr>
-              <a:t>Metric</a:t>
+              <a:t>4 Metric</a:t>
             </a:r>
             <a:r>
               <a:rPr lang="en-US" sz="1350" dirty="0">
@@ -39469,7 +39484,7 @@
                   <a:srgbClr val="000000"/>
                 </a:solidFill>
               </a:rPr>
-              <a:t>Next-hop</a:t>
+              <a:t>5 Next-hop</a:t>
             </a:r>
             <a:r>
               <a:rPr lang="en-US" sz="1350" dirty="0">
@@ -39491,7 +39506,7 @@
                   <a:srgbClr val="000000"/>
                 </a:solidFill>
               </a:rPr>
-              <a:t>Route timestamp</a:t>
+              <a:t>6 Route timestamp</a:t>
             </a:r>
             <a:r>
               <a:rPr lang="en-US" sz="1350" dirty="0">
@@ -39508,12 +39523,20 @@
               <a:buChar char="•"/>
             </a:pPr>
             <a:r>
+              <a:rPr lang="en-US" sz="1350" b="1">
+                <a:solidFill>
+                  <a:srgbClr val="000000"/>
+                </a:solidFill>
+              </a:rPr>
+              <a:t>7 Exit </a:t>
+            </a:r>
+            <a:r>
               <a:rPr lang="en-US" sz="1350" b="1" dirty="0">
                 <a:solidFill>
                   <a:srgbClr val="000000"/>
                 </a:solidFill>
               </a:rPr>
-              <a:t>Exit interface</a:t>
+              <a:t>interface</a:t>
             </a:r>
             <a:r>
               <a:rPr lang="en-US" sz="1350" dirty="0">
